--- a/docs/sales-deck/Magic-Stick-Onepager-DE.pptx
+++ b/docs/sales-deck/Magic-Stick-Onepager-DE.pptx
@@ -2,13 +2,13 @@
 <file path=ppt/presentation.xml><?xml version="1.0" encoding="utf-8"?>
 <p:presentation xmlns:p="http://schemas.openxmlformats.org/presentationml/2006/main">
   <p:sldMasterIdLst>
-    <p:sldMasterId xmlns:r="http://schemas.openxmlformats.org/officeDocument/2006/relationships" id="2147483648" r:id="R565094962c714d4b"/>
+    <p:sldMasterId xmlns:r="http://schemas.openxmlformats.org/officeDocument/2006/relationships" id="2147483648" r:id="Raf16586a235f49b6"/>
   </p:sldMasterIdLst>
   <p:notesMasterIdLst>
-    <p:notesMasterId xmlns:r="http://schemas.openxmlformats.org/officeDocument/2006/relationships" r:id="R03bd60445e784462"/>
+    <p:notesMasterId xmlns:r="http://schemas.openxmlformats.org/officeDocument/2006/relationships" r:id="R555dbe970dde4d60"/>
   </p:notesMasterIdLst>
   <p:sldIdLst>
-    <p:sldId xmlns:r="http://schemas.openxmlformats.org/officeDocument/2006/relationships" id="256" r:id="Ra2387aa4852646f1"/>
+    <p:sldId xmlns:r="http://schemas.openxmlformats.org/officeDocument/2006/relationships" id="256" r:id="Ree19a7d32e1f4909"/>
   </p:sldIdLst>
   <p:sldSz cx="11811000" cy="16706850"/>
   <p:notesSz cx="6858000" cy="9144000"/>
@@ -447,17 +447,22 @@
           </a:p>
           <a:p xmlns:a="http://schemas.openxmlformats.org/drawingml/2006/main">
             <a:r>
-              <a:t>- Hero artwork generated for this onepager; project asset: docs/sales-deck/assets/Magic-Stick-Onepager-Hero.png.</a:t>
+              <a:t>- Public repository state: 13b9d83 (2026-09-01).</a:t>
             </a:r>
           </a:p>
           <a:p xmlns:a="http://schemas.openxmlformats.org/drawingml/2006/main">
             <a:r>
-              <a:t>- Dashboard screenshot retained from Magic-Stick-Salesdeck-Dark-DE.pptx and cropped to a public-safe product view.</a:t>
+              <a:t>- docs/installation/README.md, docs/dashboard.md, docs/model-catalog.md and docs/authentication.md.</a:t>
             </a:r>
           </a:p>
           <a:p xmlns:a="http://schemas.openxmlformats.org/drawingml/2006/main">
             <a:r>
-              <a:t>- Product claims are based on the public Magic Stick repository and existing sales deck. No external metrics or customer claims used.</a:t>
+              <a:t>- Product screenshot will be captured from the current test server in Chrome.</a:t>
+            </a:r>
+          </a:p>
+          <a:p xmlns:a="http://schemas.openxmlformats.org/drawingml/2006/main">
+            <a:r>
+              <a:t>- Enterprise capabilities are explicitly presented as a target concept in conception.</a:t>
             </a:r>
           </a:p>
         </p:txBody>
@@ -525,7 +530,7 @@
   </p:cSld>
   <p:clrMap bg1="lt1" tx1="dk1" bg2="lt2" tx2="dk2" accent1="accent1" accent2="accent2" accent3="accent3" accent4="accent4" accent5="accent5" accent6="accent6" hlink="hlink" folHlink="folHlink"/>
   <p:sldLayoutIdLst>
-    <p:sldLayoutId xmlns:r="http://schemas.openxmlformats.org/officeDocument/2006/relationships" id="2147483649" r:id="R3e565bd446b44c34"/>
+    <p:sldLayoutId xmlns:r="http://schemas.openxmlformats.org/officeDocument/2006/relationships" id="2147483649" r:id="Rba8403645aec4b15"/>
   </p:sldLayoutIdLst>
   <p:txStyles>
     <p:titleStyle>
@@ -1073,14 +1078,14 @@
       </p:grpSpPr>
       <p:pic>
         <p:nvPicPr>
-          <p:cNvPr id="39" name=""/>
+          <p:cNvPr id="41" name=""/>
           <p:cNvPicPr>
             <a:picLocks xmlns:a="http://schemas.openxmlformats.org/drawingml/2006/main" noChangeAspect="1"/>
           </p:cNvPicPr>
           <p:nvPr/>
         </p:nvPicPr>
         <p:blipFill>
-          <a:blip xmlns:r="http://schemas.openxmlformats.org/officeDocument/2006/relationships" xmlns:a="http://schemas.openxmlformats.org/drawingml/2006/main" r:embed="Rc8046a4498414c81"/>
+          <a:blip xmlns:r="http://schemas.openxmlformats.org/officeDocument/2006/relationships" xmlns:a="http://schemas.openxmlformats.org/drawingml/2006/main" r:embed="R0315dc8f5a0948c2"/>
           <a:srcRect xmlns:a="http://schemas.openxmlformats.org/drawingml/2006/main" l="0" t="10685" r="0" b="10685"/>
           <a:stretch xmlns:a="http://schemas.openxmlformats.org/drawingml/2006/main">
             <a:fillRect l="0" t="0" r="0" b="0"/>
@@ -1420,7 +1425,7 @@
                 <a:ea typeface="Avenir Next"/>
                 <a:cs typeface="Avenir Next"/>
               </a:rPr>
-              <a:t>Magic Stick verbindet Modelle, Anwendungen, SSO und Betrieb zu einer offenen Plattform auf Ihrer Infrastruktur.</a:t>
+              <a:t>Magic Stick verbindet Modelle, Services, SSO und GitOps-Betrieb zu einer offenen Plattform auf Ihrer Infrastruktur.</a:t>
             </a:r>
           </a:p>
         </p:txBody>
@@ -1823,7 +1828,7 @@
                 <a:ea typeface="Avenir Next"/>
                 <a:cs typeface="Avenir Next"/>
               </a:rPr>
-              <a:t>Vom Rechner zur Plattform.</a:t>
+              <a:t>Vier Startpunkte. Ein Zielzustand.</a:t>
             </a:r>
           </a:p>
         </p:txBody>
@@ -1885,7 +1890,7 @@
                 <a:ea typeface="Avenir Next"/>
                 <a:cs typeface="Avenir Next"/>
               </a:rPr>
-              <a:t>Auf Hardware, einer VM oder Kubernetes starten – reproduzierbar statt individuell zusammengesetzt.</a:t>
+              <a:t>Per USB, Cloud-init, Ubuntu-Skript oder bestehendem Kubernetes – mit demselben sicheren First Run.</a:t>
             </a:r>
           </a:p>
         </p:txBody>
@@ -2042,7 +2047,7 @@
                 <a:ea typeface="Avenir Next"/>
                 <a:cs typeface="Avenir Next"/>
               </a:rPr>
-              <a:t>Ohne GPU beginnen.</a:t>
+              <a:t>Extern oder lokal starten.</a:t>
             </a:r>
           </a:p>
         </p:txBody>
@@ -2104,7 +2109,7 @@
                 <a:ea typeface="Avenir Next"/>
                 <a:cs typeface="Avenir Next"/>
               </a:rPr>
-              <a:t>Externe Modelle sofort nutzen und lokale Inferenz bei Bedarf ergänzen.</a:t>
+              <a:t>Externe Provider via LiteLLM; lokale Modelle mit vLLM oder Ollama auf CPU und passender GPU.</a:t>
             </a:r>
           </a:p>
         </p:txBody>
@@ -2323,7 +2328,7 @@
                 <a:ea typeface="Avenir Next"/>
                 <a:cs typeface="Avenir Next"/>
               </a:rPr>
-              <a:t>Module, Modelle und Instanzen zentral steuern und mit Keycloak-SSO schützen.</a:t>
+              <a:t>Services, Modelle und Benutzer zentral steuern; geschützte Routen über Keycloak-SSO öffnen.</a:t>
             </a:r>
           </a:p>
         </p:txBody>
@@ -2507,7 +2512,7 @@
                 <a:ea typeface="Avenir Next"/>
                 <a:cs typeface="Avenir Next"/>
               </a:rPr>
-              <a:t>für die ganze</a:t>
+              <a:t>für Services,</a:t>
             </a:r>
           </a:p>
           <a:p xmlns:a="http://schemas.openxmlformats.org/drawingml/2006/main">
@@ -2534,7 +2539,7 @@
                 <a:ea typeface="Avenir Next"/>
                 <a:cs typeface="Avenir Next"/>
               </a:rPr>
-              <a:t>Appliance.</a:t>
+              <a:t>Modelle &amp; Nutzer.</a:t>
             </a:r>
           </a:p>
         </p:txBody>
@@ -2596,7 +2601,7 @@
                 <a:ea typeface="Avenir Next"/>
                 <a:cs typeface="Avenir Next"/>
               </a:rPr>
-              <a:t>Module, Modelle, Instanzen und Benutzer werden zentral sichtbar und steuerbar.</a:t>
+              <a:t>Nur verfügbare Engines und Hardware werden angeboten.</a:t>
             </a:r>
           </a:p>
         </p:txBody>
@@ -2638,28 +2643,26 @@
       </p:sp>
       <p:pic>
         <p:nvPicPr>
-          <p:cNvPr id="66" name=""/>
+          <p:cNvPr id="68" name=""/>
           <p:cNvPicPr>
             <a:picLocks xmlns:a="http://schemas.openxmlformats.org/drawingml/2006/main" noChangeAspect="1"/>
           </p:cNvPicPr>
           <p:nvPr/>
         </p:nvPicPr>
         <p:blipFill>
-          <a:blip xmlns:r="http://schemas.openxmlformats.org/officeDocument/2006/relationships" xmlns:a="http://schemas.openxmlformats.org/drawingml/2006/main" r:embed="R029bf45ef2df4817"/>
-          <a:srcRect xmlns:a="http://schemas.openxmlformats.org/drawingml/2006/main" l="0" t="22334" r="0" b="22334"/>
+          <a:blip xmlns:r="http://schemas.openxmlformats.org/officeDocument/2006/relationships" xmlns:a="http://schemas.openxmlformats.org/drawingml/2006/main" r:embed="R4fd117e788e3410a"/>
+          <a:srcRect xmlns:a="http://schemas.openxmlformats.org/drawingml/2006/main" l="0" t="0" r="0" b="0"/>
           <a:stretch xmlns:a="http://schemas.openxmlformats.org/drawingml/2006/main">
             <a:fillRect l="0" t="0" r="0" b="0"/>
           </a:stretch>
         </p:blipFill>
         <p:spPr>
-          <a:xfrm xmlns:a="http://schemas.openxmlformats.org/drawingml/2006/main">
+          <a:xfrm xmlns:a="http://schemas.openxmlformats.org/drawingml/2006/main" flipH="0" flipV="0">
             <a:off x="4419600" y="11811000"/>
             <a:ext cx="6629400" cy="1981200"/>
           </a:xfrm>
           <a:prstGeom xmlns:a="http://schemas.openxmlformats.org/drawingml/2006/main" prst="roundRect">
-            <a:avLst>
-              <a:gd name="adj" fmla="val 7692"/>
-            </a:avLst>
+            <a:avLst/>
           </a:prstGeom>
         </p:spPr>
       </p:pic>
@@ -2720,7 +2723,7 @@
                 <a:ea typeface="Avenir Next"/>
                 <a:cs typeface="Avenir Next"/>
               </a:rPr>
-              <a:t>ECHTE PRODUKTOBERFLÄCHE · AKTUELLER ENTWICKLUNGSSTAND</a:t>
+              <a:t>AKTUELLE PRODUKTOBERFLÄCHE · BEISPIELKONFIGURATION</a:t>
             </a:r>
           </a:p>
         </p:txBody>
@@ -2948,7 +2951,7 @@
                 <a:ea typeface="Avenir Next"/>
                 <a:cs typeface="Avenir Next"/>
               </a:rPr>
-              <a:t>Enterprise ergänzt auf Anfrage gezielte Zugriffe für Benutzer und Gruppen sowie delegierte Administration.</a:t>
+              <a:t>Enterprise-Zielbild in Konzeption: Nutzer-/Gruppenfreigaben je Ressource, Scopes und delegierte Administration.</a:t>
             </a:r>
           </a:p>
         </p:txBody>
@@ -3113,7 +3116,7 @@
                 <a:latin typeface="Avenir Next"/>
                 <a:ea typeface="Avenir Next"/>
                 <a:cs typeface="Avenir Next"/>
-                <a:hlinkClick xmlns:r="http://schemas.openxmlformats.org/officeDocument/2006/relationships" r:id="Ra449d25b56df4fa6"/>
+                <a:hlinkClick xmlns:r="http://schemas.openxmlformats.org/officeDocument/2006/relationships" r:id="R0ae1b9b49b5c4dac"/>
               </a:rPr>
               <a:t>github.com/QualityMinds/AIppliance-Magic-Stick</a:t>
             </a:r>
@@ -3238,7 +3241,7 @@
                 <a:latin typeface="Avenir Next"/>
                 <a:ea typeface="Avenir Next"/>
                 <a:cs typeface="Avenir Next"/>
-                <a:hlinkClick xmlns:r="http://schemas.openxmlformats.org/officeDocument/2006/relationships" r:id="Rc5830012341544ab"/>
+                <a:hlinkClick xmlns:r="http://schemas.openxmlformats.org/officeDocument/2006/relationships" r:id="R8faf0b008583443e"/>
               </a:rPr>
               <a:t>hello@qualityminds.de</a:t>
             </a:r>
